--- a/public/fun/pack/pptx/birthdaypro/돌잔치프리미엄_33_사진중심_와인로즈.pptx
+++ b/public/fun/pack/pptx/birthdaypro/돌잔치프리미엄_33_사진중심_와인로즈.pptx
@@ -112,12 +112,12 @@
   <p:extLst>
     <p:ext uri="{521415D9-36F7-43E2-AB2F-B90AF26B5E84}">
       <p14:sectionLst xmlns:p14="http://schemas.microsoft.com/office/powerpoint/2010/main">
-        <p14:section name="시작" id="{EA1F17BC-8BD9-47F5-AFC7-278313DB1E5F}">
+        <p14:section name="시작" id="{7575F9B6-F2BC-4871-9B49-E49BBD83BEC5}">
           <p14:sldIdLst>
             <p14:sldId id="256"/>
           </p14:sldIdLst>
         </p14:section>
-        <p14:section name="본문" id="{BE67E15A-DE9E-46B2-9120-63093EB88435}">
+        <p14:section name="본문" id="{0BAC2D77-64CD-4431-9793-A86D017ED71E}">
           <p14:sldIdLst>
             <p14:sldId id="257"/>
             <p14:sldId id="258"/>
@@ -125,7 +125,7 @@
             <p14:sldId id="260"/>
           </p14:sldIdLst>
         </p14:section>
-        <p14:section name="마무리" id="{ACE3EEEE-D03E-4E37-A5FC-ECD057C1F7C8}">
+        <p14:section name="마무리" id="{E9AD972A-5474-4037-979C-E59D7DEAB0E2}">
           <p14:sldIdLst>
             <p14:sldId id="261"/>
           </p14:sldIdLst>
@@ -1489,7 +1489,7 @@
             </a:lvl1pPr>
           </a:lstStyle>
           <a:p>
-            <a:fld id="{F83B4954-891C-4215-95D4-F0A4021D3F16}" type="slidenum">
+            <a:fld id="{A8D108EF-0021-4092-8692-640CE227612F}" type="slidenum">
               <a:rPr lang="en-US"/>
               <a:t>‹#›</a:t>
             </a:fld>
@@ -2199,7 +2199,7 @@
             </a:lvl1pPr>
           </a:lstStyle>
           <a:p>
-            <a:fld id="{9E6FCDEC-CE92-48CD-A6A0-03575A444034}" type="slidenum">
+            <a:fld id="{9804C15F-4618-42A8-956D-B6AE20C92998}" type="slidenum">
               <a:rPr lang="en-US"/>
               <a:t>‹#›</a:t>
             </a:fld>
@@ -2869,7 +2869,7 @@
             </a:lvl1pPr>
           </a:lstStyle>
           <a:p>
-            <a:fld id="{F77EBAA7-21DB-4F10-9D51-7ACF2F3210F8}" type="slidenum">
+            <a:fld id="{C707D05D-0FE8-4411-B300-FF89A4B7277B}" type="slidenum">
               <a:rPr lang="en-US"/>
               <a:t>‹#›</a:t>
             </a:fld>
@@ -3732,7 +3732,7 @@
           <a:p>
             <a:r>
               <a:rPr lang="ko-KR"/>
-              <a:t>아기 이름 · 0000. 00. 00</a:t>
+              <a:t>아기 이름 · 날짜 입력</a:t>
             </a:r>
           </a:p>
           <a:p>
@@ -3895,7 +3895,7 @@
           <a:bodyPr/>
           <a:lstStyle/>
           <a:p>
-            <a:fld id="{F12DDEC8-9D08-4A77-9531-DE762D7C2A57}" type="slidenum">
+            <a:fld id="{0713A4DB-9DBB-425C-8C67-E83F9A936AC2}" type="slidenum">
               <a:rPr lang="en-US"/>
               <a:t>‹#›</a:t>
             </a:fld>
@@ -4635,7 +4635,7 @@
           <a:bodyPr/>
           <a:lstStyle/>
           <a:p>
-            <a:fld id="{62777642-62B8-4E86-8845-9E3FF82E1712}" type="slidenum">
+            <a:fld id="{5DCA9BFA-9B9F-4D5D-A3B7-23797E435F44}" type="slidenum">
               <a:rPr lang="en-US"/>
               <a:t>‹#›</a:t>
             </a:fld>
@@ -4723,7 +4723,7 @@
           <a:bodyPr/>
           <a:lstStyle/>
           <a:p>
-            <a:fld id="{DEE4899F-C6B7-4915-A99E-B8C611BFE0DC}" type="slidenum">
+            <a:fld id="{E1F9DA29-B928-4C74-B116-A306865A5820}" type="slidenum">
               <a:rPr lang="en-US"/>
               <a:t>‹#›</a:t>
             </a:fld>
@@ -6104,7 +6104,7 @@
           <a:bodyPr/>
           <a:lstStyle/>
           <a:p>
-            <a:fld id="{332F3F75-141C-4643-A442-7369523E2BA0}" type="slidenum">
+            <a:fld id="{B7062BD0-6F91-42B8-8DA5-8C6085D6C8FC}" type="slidenum">
               <a:rPr lang="en-US"/>
               <a:t>‹#›</a:t>
             </a:fld>
